--- a/notion_journal/weekly_log_2026-10-14.pptx
+++ b/notion_journal/weekly_log_2026-10-14.pptx
@@ -13,9 +13,8 @@
     <p:sldId id="261" r:id="rId7"/>
     <p:sldId id="262" r:id="rId8"/>
     <p:sldId id="263" r:id="rId9"/>
-    <p:sldId id="264" r:id="rId10"/>
-    <p:sldId id="265" r:id="rId11"/>
-    <p:sldId id="267" r:id="rId12"/>
+    <p:sldId id="265" r:id="rId10"/>
+    <p:sldId id="267" r:id="rId11"/>
   </p:sldIdLst>
   <p:sldSz cx="12192000" cy="6858000"/>
   <p:notesSz cx="6858000" cy="9144000"/>
@@ -131,242 +130,6 @@
     </p:ext>
   </p:extLst>
 </p:presentation>
-</file>
-
-<file path=ppt/charts/chart1.xml><?xml version="1.0" encoding="utf-8"?>
-<c:chartSpace xmlns:c="http://schemas.openxmlformats.org/drawingml/2006/chart" xmlns:a="http://schemas.openxmlformats.org/drawingml/2006/main" xmlns:r="http://schemas.openxmlformats.org/officeDocument/2006/relationships" xmlns:c16r2="http://schemas.microsoft.com/office/drawing/2015/06/chart">
-  <c:date1904 val="0"/>
-  <c:lang val="zh-TW"/>
-  <c:roundedCorners val="1"/>
-  <c:style val="2"/>
-  <c:chart>
-    <c:title>
-      <c:tx>
-        <c:rich>
-          <a:bodyPr/>
-          <a:lstStyle/>
-          <a:p>
-            <a:r>
-              <a:rPr lang="en-US" sz="1400"/>
-              <a:t>Test Accuracy (%)</a:t>
-            </a:r>
-          </a:p>
-        </c:rich>
-      </c:tx>
-      <c:overlay val="0"/>
-    </c:title>
-    <c:autoTitleDeleted val="0"/>
-    <c:plotArea>
-      <c:layout/>
-      <c:barChart>
-        <c:barDir val="col"/>
-        <c:grouping val="clustered"/>
-        <c:varyColors val="1"/>
-        <c:ser>
-          <c:idx val="0"/>
-          <c:order val="0"/>
-          <c:tx>
-            <c:strRef>
-              <c:f>Sheet1!$B$1</c:f>
-              <c:strCache>
-                <c:ptCount val="1"/>
-                <c:pt idx="0">
-                  <c:v>Test Accuracy (%)</c:v>
-                </c:pt>
-              </c:strCache>
-            </c:strRef>
-          </c:tx>
-          <c:spPr>
-            <a:solidFill>
-              <a:srgbClr val="E8DCCB"/>
-            </a:solidFill>
-          </c:spPr>
-          <c:invertIfNegative val="1"/>
-          <c:dPt>
-            <c:idx val="0"/>
-            <c:invertIfNegative val="1"/>
-            <c:bubble3D val="0"/>
-            <c:spPr>
-              <a:solidFill>
-                <a:srgbClr val="C77D2E"/>
-              </a:solidFill>
-            </c:spPr>
-            <c:extLst>
-              <c:ext xmlns:c16="http://schemas.microsoft.com/office/drawing/2014/chart" uri="{C3380CC4-5D6E-409C-BE32-E72D297353CC}">
-                <c16:uniqueId val="{00000001-2175-416D-8A0B-3FE9DF11B5F3}"/>
-              </c:ext>
-            </c:extLst>
-          </c:dPt>
-          <c:dLbls>
-            <c:numFmt formatCode="0.0" sourceLinked="0"/>
-            <c:spPr>
-              <a:noFill/>
-              <a:ln>
-                <a:noFill/>
-              </a:ln>
-              <a:effectLst/>
-            </c:spPr>
-            <c:txPr>
-              <a:bodyPr/>
-              <a:lstStyle/>
-              <a:p>
-                <a:pPr>
-                  <a:defRPr sz="1400"/>
-                </a:pPr>
-                <a:endParaRPr lang="zh-TW"/>
-              </a:p>
-            </c:txPr>
-            <c:dLblPos val="outEnd"/>
-            <c:showLegendKey val="0"/>
-            <c:showVal val="1"/>
-            <c:showCatName val="0"/>
-            <c:showSerName val="0"/>
-            <c:showPercent val="0"/>
-            <c:showBubbleSize val="0"/>
-            <c:showLeaderLines val="0"/>
-            <c:extLst>
-              <c:ext xmlns:c15="http://schemas.microsoft.com/office/drawing/2012/chart" uri="{CE6537A1-D6FC-4f65-9D91-7224C49458BB}">
-                <c15:showLeaderLines val="0"/>
-              </c:ext>
-            </c:extLst>
-          </c:dLbls>
-          <c:cat>
-            <c:strRef>
-              <c:f>Sheet1!$A$2:$A$4</c:f>
-              <c:strCache>
-                <c:ptCount val="3"/>
-                <c:pt idx="0">
-                  <c:v>水洗</c:v>
-                </c:pt>
-                <c:pt idx="1">
-                  <c:v>日曬</c:v>
-                </c:pt>
-                <c:pt idx="2">
-                  <c:v>蜜處理</c:v>
-                </c:pt>
-              </c:strCache>
-            </c:strRef>
-          </c:cat>
-          <c:val>
-            <c:numRef>
-              <c:f>Sheet1!$B$2:$B$4</c:f>
-              <c:numCache>
-                <c:formatCode>General</c:formatCode>
-                <c:ptCount val="3"/>
-                <c:pt idx="0">
-                  <c:v>97</c:v>
-                </c:pt>
-                <c:pt idx="1">
-                  <c:v>99.3</c:v>
-                </c:pt>
-                <c:pt idx="2">
-                  <c:v>99.3</c:v>
-                </c:pt>
-              </c:numCache>
-            </c:numRef>
-          </c:val>
-          <c:extLst>
-            <c:ext xmlns:c14="http://schemas.microsoft.com/office/drawing/2007/8/2/chart" uri="{6F2FDCE9-48DA-4B69-8628-5D25D57E5C99}">
-              <c14:invertSolidFillFmt>
-                <c14:spPr xmlns:c14="http://schemas.microsoft.com/office/drawing/2007/8/2/chart">
-                  <a:solidFill>
-                    <a:srgbClr val="FFFFFF"/>
-                  </a:solidFill>
-                </c14:spPr>
-              </c14:invertSolidFillFmt>
-            </c:ext>
-            <c:ext xmlns:c16="http://schemas.microsoft.com/office/drawing/2014/chart" uri="{C3380CC4-5D6E-409C-BE32-E72D297353CC}">
-              <c16:uniqueId val="{00000002-2175-416D-8A0B-3FE9DF11B5F3}"/>
-            </c:ext>
-          </c:extLst>
-        </c:ser>
-        <c:dLbls>
-          <c:dLblPos val="outEnd"/>
-          <c:showLegendKey val="0"/>
-          <c:showVal val="1"/>
-          <c:showCatName val="0"/>
-          <c:showSerName val="0"/>
-          <c:showPercent val="0"/>
-          <c:showBubbleSize val="0"/>
-        </c:dLbls>
-        <c:gapWidth val="60"/>
-        <c:axId val="-2068027336"/>
-        <c:axId val="-2113994440"/>
-      </c:barChart>
-      <c:catAx>
-        <c:axId val="-2068027336"/>
-        <c:scaling>
-          <c:orientation val="minMax"/>
-        </c:scaling>
-        <c:delete val="0"/>
-        <c:axPos val="b"/>
-        <c:numFmt formatCode="General" sourceLinked="0"/>
-        <c:majorTickMark val="out"/>
-        <c:minorTickMark val="none"/>
-        <c:tickLblPos val="nextTo"/>
-        <c:txPr>
-          <a:bodyPr/>
-          <a:lstStyle/>
-          <a:p>
-            <a:pPr>
-              <a:defRPr sz="1300"/>
-            </a:pPr>
-            <a:endParaRPr lang="zh-TW"/>
-          </a:p>
-        </c:txPr>
-        <c:crossAx val="-2113994440"/>
-        <c:crosses val="autoZero"/>
-        <c:auto val="1"/>
-        <c:lblAlgn val="ctr"/>
-        <c:lblOffset val="100"/>
-        <c:noMultiLvlLbl val="0"/>
-      </c:catAx>
-      <c:valAx>
-        <c:axId val="-2113994440"/>
-        <c:scaling>
-          <c:orientation val="minMax"/>
-          <c:max val="100"/>
-          <c:min val="94"/>
-        </c:scaling>
-        <c:delete val="0"/>
-        <c:axPos val="l"/>
-        <c:numFmt formatCode="General" sourceLinked="1"/>
-        <c:majorTickMark val="out"/>
-        <c:minorTickMark val="none"/>
-        <c:tickLblPos val="nextTo"/>
-        <c:txPr>
-          <a:bodyPr/>
-          <a:lstStyle/>
-          <a:p>
-            <a:pPr>
-              <a:defRPr sz="1200"/>
-            </a:pPr>
-            <a:endParaRPr lang="zh-TW"/>
-          </a:p>
-        </c:txPr>
-        <c:crossAx val="-2068027336"/>
-        <c:crosses val="autoZero"/>
-        <c:crossBetween val="between"/>
-      </c:valAx>
-    </c:plotArea>
-    <c:plotVisOnly val="1"/>
-    <c:dispBlanksAs val="gap"/>
-    <c:showDLblsOverMax val="1"/>
-  </c:chart>
-  <c:txPr>
-    <a:bodyPr/>
-    <a:lstStyle/>
-    <a:p>
-      <a:pPr>
-        <a:defRPr sz="1800"/>
-      </a:pPr>
-      <a:endParaRPr lang="zh-TW"/>
-    </a:p>
-  </c:txPr>
-  <c:externalData r:id="rId1">
-    <c:autoUpdate val="0"/>
-  </c:externalData>
-</c:chartSpace>
 </file>
 
 <file path=ppt/slideLayouts/slideLayout1.xml><?xml version="1.0" encoding="utf-8"?>
@@ -3475,749 +3238,6 @@
     <p:bg>
       <p:bgPr>
         <a:solidFill>
-          <a:srgbClr val="FFFFFF"/>
-        </a:solidFill>
-        <a:effectLst/>
-      </p:bgPr>
-    </p:bg>
-    <p:spTree>
-      <p:nvGrpSpPr>
-        <p:cNvPr id="1" name=""/>
-        <p:cNvGrpSpPr/>
-        <p:nvPr/>
-      </p:nvGrpSpPr>
-      <p:grpSpPr>
-        <a:xfrm>
-          <a:off x="0" y="0"/>
-          <a:ext cx="0" cy="0"/>
-          <a:chOff x="0" y="0"/>
-          <a:chExt cx="0" cy="0"/>
-        </a:xfrm>
-      </p:grpSpPr>
-      <p:sp>
-        <p:nvSpPr>
-          <p:cNvPr id="2" name="TextBox 1"/>
-          <p:cNvSpPr txBox="1"/>
-          <p:nvPr/>
-        </p:nvSpPr>
-        <p:spPr>
-          <a:xfrm>
-            <a:off x="548640" y="365760"/>
-            <a:ext cx="10972800" cy="731520"/>
-          </a:xfrm>
-          <a:prstGeom prst="rect">
-            <a:avLst/>
-          </a:prstGeom>
-          <a:noFill/>
-        </p:spPr>
-        <p:txBody>
-          <a:bodyPr wrap="square" lIns="0" tIns="0" rIns="0" bIns="0" anchor="t">
-            <a:spAutoFit/>
-          </a:bodyPr>
-          <a:lstStyle/>
-          <a:p>
-            <a:pPr algn="l">
-              <a:spcAft>
-                <a:spcPts val="600"/>
-              </a:spcAft>
-            </a:pPr>
-            <a:r>
-              <a:rPr sz="3200" b="1">
-                <a:solidFill>
-                  <a:srgbClr val="2B1D14"/>
-                </a:solidFill>
-                <a:latin typeface="Microsoft JhengHei"/>
-              </a:rPr>
-              <a:t>被判錯的照片（test 集）</a:t>
-            </a:r>
-          </a:p>
-        </p:txBody>
-      </p:sp>
-      <p:pic>
-        <p:nvPicPr>
-          <p:cNvPr id="3" name="Picture 2" descr="water_missed_0.089_P_20261007_205845.jpg"/>
-          <p:cNvPicPr>
-            <a:picLocks noChangeAspect="1"/>
-          </p:cNvPicPr>
-          <p:nvPr/>
-        </p:nvPicPr>
-        <p:blipFill>
-          <a:blip r:embed="rId2"/>
-          <a:stretch>
-            <a:fillRect/>
-          </a:stretch>
-        </p:blipFill>
-        <p:spPr>
-          <a:xfrm>
-            <a:off x="548640" y="1234440"/>
-            <a:ext cx="1828800" cy="1828800"/>
-          </a:xfrm>
-          <a:prstGeom prst="rect">
-            <a:avLst/>
-          </a:prstGeom>
-        </p:spPr>
-      </p:pic>
-      <p:sp>
-        <p:nvSpPr>
-          <p:cNvPr id="4" name="TextBox 3"/>
-          <p:cNvSpPr txBox="1"/>
-          <p:nvPr/>
-        </p:nvSpPr>
-        <p:spPr>
-          <a:xfrm>
-            <a:off x="548640" y="3108960"/>
-            <a:ext cx="2560320" cy="640080"/>
-          </a:xfrm>
-          <a:prstGeom prst="rect">
-            <a:avLst/>
-          </a:prstGeom>
-          <a:noFill/>
-        </p:spPr>
-        <p:txBody>
-          <a:bodyPr wrap="square" lIns="0" tIns="0" rIns="0" bIns="0" anchor="t">
-            <a:spAutoFit/>
-          </a:bodyPr>
-          <a:lstStyle/>
-          <a:p>
-            <a:pPr algn="l">
-              <a:spcAft>
-                <a:spcPts val="600"/>
-              </a:spcAft>
-            </a:pPr>
-            <a:r>
-              <a:rPr sz="1300" b="1">
-                <a:solidFill>
-                  <a:srgbClr val="B03A2E"/>
-                </a:solidFill>
-                <a:latin typeface="Microsoft JhengHei"/>
-              </a:rPr>
-              <a:t>水洗 漏抓</a:t>
-            </a:r>
-          </a:p>
-          <a:p>
-            <a:pPr algn="l">
-              <a:spcAft>
-                <a:spcPts val="600"/>
-              </a:spcAft>
-            </a:pPr>
-            <a:r>
-              <a:rPr sz="1300" b="1">
-                <a:solidFill>
-                  <a:srgbClr val="B03A2E"/>
-                </a:solidFill>
-                <a:latin typeface="Microsoft JhengHei"/>
-              </a:rPr>
-              <a:t>p_bad 0.089</a:t>
-            </a:r>
-          </a:p>
-        </p:txBody>
-      </p:sp>
-      <p:pic>
-        <p:nvPicPr>
-          <p:cNvPr id="5" name="Picture 4" descr="water_missed_0.119_P_20261007_210823.jpg"/>
-          <p:cNvPicPr>
-            <a:picLocks noChangeAspect="1"/>
-          </p:cNvPicPr>
-          <p:nvPr/>
-        </p:nvPicPr>
-        <p:blipFill>
-          <a:blip r:embed="rId3"/>
-          <a:stretch>
-            <a:fillRect/>
-          </a:stretch>
-        </p:blipFill>
-        <p:spPr>
-          <a:xfrm>
-            <a:off x="3364992" y="1234440"/>
-            <a:ext cx="1828800" cy="1828800"/>
-          </a:xfrm>
-          <a:prstGeom prst="rect">
-            <a:avLst/>
-          </a:prstGeom>
-        </p:spPr>
-      </p:pic>
-      <p:sp>
-        <p:nvSpPr>
-          <p:cNvPr id="6" name="TextBox 5"/>
-          <p:cNvSpPr txBox="1"/>
-          <p:nvPr/>
-        </p:nvSpPr>
-        <p:spPr>
-          <a:xfrm>
-            <a:off x="3364992" y="3108960"/>
-            <a:ext cx="2560320" cy="640080"/>
-          </a:xfrm>
-          <a:prstGeom prst="rect">
-            <a:avLst/>
-          </a:prstGeom>
-          <a:noFill/>
-        </p:spPr>
-        <p:txBody>
-          <a:bodyPr wrap="square" lIns="0" tIns="0" rIns="0" bIns="0" anchor="t">
-            <a:spAutoFit/>
-          </a:bodyPr>
-          <a:lstStyle/>
-          <a:p>
-            <a:pPr algn="l">
-              <a:spcAft>
-                <a:spcPts val="600"/>
-              </a:spcAft>
-            </a:pPr>
-            <a:r>
-              <a:rPr sz="1300" b="1">
-                <a:solidFill>
-                  <a:srgbClr val="B03A2E"/>
-                </a:solidFill>
-                <a:latin typeface="Microsoft JhengHei"/>
-              </a:rPr>
-              <a:t>水洗 漏抓</a:t>
-            </a:r>
-          </a:p>
-          <a:p>
-            <a:pPr algn="l">
-              <a:spcAft>
-                <a:spcPts val="600"/>
-              </a:spcAft>
-            </a:pPr>
-            <a:r>
-              <a:rPr sz="1300" b="1">
-                <a:solidFill>
-                  <a:srgbClr val="B03A2E"/>
-                </a:solidFill>
-                <a:latin typeface="Microsoft JhengHei"/>
-              </a:rPr>
-              <a:t>p_bad 0.119</a:t>
-            </a:r>
-          </a:p>
-        </p:txBody>
-      </p:sp>
-      <p:pic>
-        <p:nvPicPr>
-          <p:cNvPr id="7" name="Picture 6" descr="water_missed_0.417_P_20261008_151908.jpg"/>
-          <p:cNvPicPr>
-            <a:picLocks noChangeAspect="1"/>
-          </p:cNvPicPr>
-          <p:nvPr/>
-        </p:nvPicPr>
-        <p:blipFill>
-          <a:blip r:embed="rId4"/>
-          <a:stretch>
-            <a:fillRect/>
-          </a:stretch>
-        </p:blipFill>
-        <p:spPr>
-          <a:xfrm>
-            <a:off x="6181344" y="1234440"/>
-            <a:ext cx="1828800" cy="1828800"/>
-          </a:xfrm>
-          <a:prstGeom prst="rect">
-            <a:avLst/>
-          </a:prstGeom>
-        </p:spPr>
-      </p:pic>
-      <p:sp>
-        <p:nvSpPr>
-          <p:cNvPr id="8" name="TextBox 7"/>
-          <p:cNvSpPr txBox="1"/>
-          <p:nvPr/>
-        </p:nvSpPr>
-        <p:spPr>
-          <a:xfrm>
-            <a:off x="6181344" y="3108960"/>
-            <a:ext cx="2560320" cy="640080"/>
-          </a:xfrm>
-          <a:prstGeom prst="rect">
-            <a:avLst/>
-          </a:prstGeom>
-          <a:noFill/>
-        </p:spPr>
-        <p:txBody>
-          <a:bodyPr wrap="square" lIns="0" tIns="0" rIns="0" bIns="0" anchor="t">
-            <a:spAutoFit/>
-          </a:bodyPr>
-          <a:lstStyle/>
-          <a:p>
-            <a:pPr algn="l">
-              <a:spcAft>
-                <a:spcPts val="600"/>
-              </a:spcAft>
-            </a:pPr>
-            <a:r>
-              <a:rPr sz="1300" b="1">
-                <a:solidFill>
-                  <a:srgbClr val="B03A2E"/>
-                </a:solidFill>
-                <a:latin typeface="Microsoft JhengHei"/>
-              </a:rPr>
-              <a:t>水洗 漏抓</a:t>
-            </a:r>
-          </a:p>
-          <a:p>
-            <a:pPr algn="l">
-              <a:spcAft>
-                <a:spcPts val="600"/>
-              </a:spcAft>
-            </a:pPr>
-            <a:r>
-              <a:rPr sz="1300" b="1">
-                <a:solidFill>
-                  <a:srgbClr val="B03A2E"/>
-                </a:solidFill>
-                <a:latin typeface="Microsoft JhengHei"/>
-              </a:rPr>
-              <a:t>p_bad 0.417</a:t>
-            </a:r>
-          </a:p>
-        </p:txBody>
-      </p:sp>
-      <p:pic>
-        <p:nvPicPr>
-          <p:cNvPr id="9" name="Picture 8" descr="water_missed_0.453_P_20261008_145418.jpg"/>
-          <p:cNvPicPr>
-            <a:picLocks noChangeAspect="1"/>
-          </p:cNvPicPr>
-          <p:nvPr/>
-        </p:nvPicPr>
-        <p:blipFill>
-          <a:blip r:embed="rId5"/>
-          <a:stretch>
-            <a:fillRect/>
-          </a:stretch>
-        </p:blipFill>
-        <p:spPr>
-          <a:xfrm>
-            <a:off x="8997696" y="1234440"/>
-            <a:ext cx="1828800" cy="1828800"/>
-          </a:xfrm>
-          <a:prstGeom prst="rect">
-            <a:avLst/>
-          </a:prstGeom>
-        </p:spPr>
-      </p:pic>
-      <p:sp>
-        <p:nvSpPr>
-          <p:cNvPr id="10" name="TextBox 9"/>
-          <p:cNvSpPr txBox="1"/>
-          <p:nvPr/>
-        </p:nvSpPr>
-        <p:spPr>
-          <a:xfrm>
-            <a:off x="8997696" y="3108960"/>
-            <a:ext cx="2560320" cy="640080"/>
-          </a:xfrm>
-          <a:prstGeom prst="rect">
-            <a:avLst/>
-          </a:prstGeom>
-          <a:noFill/>
-        </p:spPr>
-        <p:txBody>
-          <a:bodyPr wrap="square" lIns="0" tIns="0" rIns="0" bIns="0" anchor="t">
-            <a:spAutoFit/>
-          </a:bodyPr>
-          <a:lstStyle/>
-          <a:p>
-            <a:pPr algn="l">
-              <a:spcAft>
-                <a:spcPts val="600"/>
-              </a:spcAft>
-            </a:pPr>
-            <a:r>
-              <a:rPr sz="1300" b="1">
-                <a:solidFill>
-                  <a:srgbClr val="B03A2E"/>
-                </a:solidFill>
-                <a:latin typeface="Microsoft JhengHei"/>
-              </a:rPr>
-              <a:t>水洗 漏抓</a:t>
-            </a:r>
-          </a:p>
-          <a:p>
-            <a:pPr algn="l">
-              <a:spcAft>
-                <a:spcPts val="600"/>
-              </a:spcAft>
-            </a:pPr>
-            <a:r>
-              <a:rPr sz="1300" b="1">
-                <a:solidFill>
-                  <a:srgbClr val="B03A2E"/>
-                </a:solidFill>
-                <a:latin typeface="Microsoft JhengHei"/>
-              </a:rPr>
-              <a:t>p_bad 0.453</a:t>
-            </a:r>
-          </a:p>
-        </p:txBody>
-      </p:sp>
-      <p:pic>
-        <p:nvPicPr>
-          <p:cNvPr id="11" name="Picture 10" descr="water_missed_0.490_P_20261007_205655.jpg"/>
-          <p:cNvPicPr>
-            <a:picLocks noChangeAspect="1"/>
-          </p:cNvPicPr>
-          <p:nvPr/>
-        </p:nvPicPr>
-        <p:blipFill>
-          <a:blip r:embed="rId6"/>
-          <a:stretch>
-            <a:fillRect/>
-          </a:stretch>
-        </p:blipFill>
-        <p:spPr>
-          <a:xfrm>
-            <a:off x="548640" y="3794760"/>
-            <a:ext cx="1828800" cy="1828800"/>
-          </a:xfrm>
-          <a:prstGeom prst="rect">
-            <a:avLst/>
-          </a:prstGeom>
-        </p:spPr>
-      </p:pic>
-      <p:sp>
-        <p:nvSpPr>
-          <p:cNvPr id="12" name="TextBox 11"/>
-          <p:cNvSpPr txBox="1"/>
-          <p:nvPr/>
-        </p:nvSpPr>
-        <p:spPr>
-          <a:xfrm>
-            <a:off x="548640" y="5669280"/>
-            <a:ext cx="2560320" cy="640080"/>
-          </a:xfrm>
-          <a:prstGeom prst="rect">
-            <a:avLst/>
-          </a:prstGeom>
-          <a:noFill/>
-        </p:spPr>
-        <p:txBody>
-          <a:bodyPr wrap="square" lIns="0" tIns="0" rIns="0" bIns="0" anchor="t">
-            <a:spAutoFit/>
-          </a:bodyPr>
-          <a:lstStyle/>
-          <a:p>
-            <a:pPr algn="l">
-              <a:spcAft>
-                <a:spcPts val="600"/>
-              </a:spcAft>
-            </a:pPr>
-            <a:r>
-              <a:rPr sz="1300" b="1">
-                <a:solidFill>
-                  <a:srgbClr val="B03A2E"/>
-                </a:solidFill>
-                <a:latin typeface="Microsoft JhengHei"/>
-              </a:rPr>
-              <a:t>水洗 漏抓</a:t>
-            </a:r>
-          </a:p>
-          <a:p>
-            <a:pPr algn="l">
-              <a:spcAft>
-                <a:spcPts val="600"/>
-              </a:spcAft>
-            </a:pPr>
-            <a:r>
-              <a:rPr sz="1300" b="1">
-                <a:solidFill>
-                  <a:srgbClr val="B03A2E"/>
-                </a:solidFill>
-                <a:latin typeface="Microsoft JhengHei"/>
-              </a:rPr>
-              <a:t>p_bad 0.490</a:t>
-            </a:r>
-          </a:p>
-        </p:txBody>
-      </p:sp>
-      <p:pic>
-        <p:nvPicPr>
-          <p:cNvPr id="13" name="Picture 12" descr="water_false_alarm_0.768_P_20261008_154404.jpg"/>
-          <p:cNvPicPr>
-            <a:picLocks noChangeAspect="1"/>
-          </p:cNvPicPr>
-          <p:nvPr/>
-        </p:nvPicPr>
-        <p:blipFill>
-          <a:blip r:embed="rId7"/>
-          <a:stretch>
-            <a:fillRect/>
-          </a:stretch>
-        </p:blipFill>
-        <p:spPr>
-          <a:xfrm>
-            <a:off x="3364992" y="3794760"/>
-            <a:ext cx="1828800" cy="1828800"/>
-          </a:xfrm>
-          <a:prstGeom prst="rect">
-            <a:avLst/>
-          </a:prstGeom>
-        </p:spPr>
-      </p:pic>
-      <p:sp>
-        <p:nvSpPr>
-          <p:cNvPr id="14" name="TextBox 13"/>
-          <p:cNvSpPr txBox="1"/>
-          <p:nvPr/>
-        </p:nvSpPr>
-        <p:spPr>
-          <a:xfrm>
-            <a:off x="3364992" y="5669280"/>
-            <a:ext cx="2560320" cy="640080"/>
-          </a:xfrm>
-          <a:prstGeom prst="rect">
-            <a:avLst/>
-          </a:prstGeom>
-          <a:noFill/>
-        </p:spPr>
-        <p:txBody>
-          <a:bodyPr wrap="square" lIns="0" tIns="0" rIns="0" bIns="0" anchor="t">
-            <a:spAutoFit/>
-          </a:bodyPr>
-          <a:lstStyle/>
-          <a:p>
-            <a:pPr algn="l">
-              <a:spcAft>
-                <a:spcPts val="600"/>
-              </a:spcAft>
-            </a:pPr>
-            <a:r>
-              <a:rPr sz="1300" b="1">
-                <a:solidFill>
-                  <a:srgbClr val="2B1D14"/>
-                </a:solidFill>
-                <a:latin typeface="Microsoft JhengHei"/>
-              </a:rPr>
-              <a:t>水洗 誤判</a:t>
-            </a:r>
-          </a:p>
-          <a:p>
-            <a:pPr algn="l">
-              <a:spcAft>
-                <a:spcPts val="600"/>
-              </a:spcAft>
-            </a:pPr>
-            <a:r>
-              <a:rPr sz="1300" b="1">
-                <a:solidFill>
-                  <a:srgbClr val="2B1D14"/>
-                </a:solidFill>
-                <a:latin typeface="Microsoft JhengHei"/>
-              </a:rPr>
-              <a:t>p_bad 0.768</a:t>
-            </a:r>
-          </a:p>
-        </p:txBody>
-      </p:sp>
-      <p:pic>
-        <p:nvPicPr>
-          <p:cNvPr id="15" name="Picture 14" descr="sun_missed_0.267_P_20261014_164140.jpg"/>
-          <p:cNvPicPr>
-            <a:picLocks noChangeAspect="1"/>
-          </p:cNvPicPr>
-          <p:nvPr/>
-        </p:nvPicPr>
-        <p:blipFill>
-          <a:blip r:embed="rId8"/>
-          <a:stretch>
-            <a:fillRect/>
-          </a:stretch>
-        </p:blipFill>
-        <p:spPr>
-          <a:xfrm>
-            <a:off x="6181344" y="3794760"/>
-            <a:ext cx="1828800" cy="1828800"/>
-          </a:xfrm>
-          <a:prstGeom prst="rect">
-            <a:avLst/>
-          </a:prstGeom>
-        </p:spPr>
-      </p:pic>
-      <p:sp>
-        <p:nvSpPr>
-          <p:cNvPr id="16" name="TextBox 15"/>
-          <p:cNvSpPr txBox="1"/>
-          <p:nvPr/>
-        </p:nvSpPr>
-        <p:spPr>
-          <a:xfrm>
-            <a:off x="6181344" y="5669280"/>
-            <a:ext cx="2560320" cy="640080"/>
-          </a:xfrm>
-          <a:prstGeom prst="rect">
-            <a:avLst/>
-          </a:prstGeom>
-          <a:noFill/>
-        </p:spPr>
-        <p:txBody>
-          <a:bodyPr wrap="square" lIns="0" tIns="0" rIns="0" bIns="0" anchor="t">
-            <a:spAutoFit/>
-          </a:bodyPr>
-          <a:lstStyle/>
-          <a:p>
-            <a:pPr algn="l">
-              <a:spcAft>
-                <a:spcPts val="600"/>
-              </a:spcAft>
-            </a:pPr>
-            <a:r>
-              <a:rPr sz="1300" b="1">
-                <a:solidFill>
-                  <a:srgbClr val="B03A2E"/>
-                </a:solidFill>
-                <a:latin typeface="Microsoft JhengHei"/>
-              </a:rPr>
-              <a:t>日曬 漏抓</a:t>
-            </a:r>
-          </a:p>
-          <a:p>
-            <a:pPr algn="l">
-              <a:spcAft>
-                <a:spcPts val="600"/>
-              </a:spcAft>
-            </a:pPr>
-            <a:r>
-              <a:rPr sz="1300" b="1">
-                <a:solidFill>
-                  <a:srgbClr val="B03A2E"/>
-                </a:solidFill>
-                <a:latin typeface="Microsoft JhengHei"/>
-              </a:rPr>
-              <a:t>p_bad 0.267</a:t>
-            </a:r>
-          </a:p>
-        </p:txBody>
-      </p:sp>
-      <p:pic>
-        <p:nvPicPr>
-          <p:cNvPr id="17" name="Picture 16" descr="honey_missed_0.405_P_20261014_135247.jpg"/>
-          <p:cNvPicPr>
-            <a:picLocks noChangeAspect="1"/>
-          </p:cNvPicPr>
-          <p:nvPr/>
-        </p:nvPicPr>
-        <p:blipFill>
-          <a:blip r:embed="rId9"/>
-          <a:stretch>
-            <a:fillRect/>
-          </a:stretch>
-        </p:blipFill>
-        <p:spPr>
-          <a:xfrm>
-            <a:off x="8997696" y="3794760"/>
-            <a:ext cx="1828800" cy="1828800"/>
-          </a:xfrm>
-          <a:prstGeom prst="rect">
-            <a:avLst/>
-          </a:prstGeom>
-        </p:spPr>
-      </p:pic>
-      <p:sp>
-        <p:nvSpPr>
-          <p:cNvPr id="18" name="TextBox 17"/>
-          <p:cNvSpPr txBox="1"/>
-          <p:nvPr/>
-        </p:nvSpPr>
-        <p:spPr>
-          <a:xfrm>
-            <a:off x="8997696" y="5669280"/>
-            <a:ext cx="2560320" cy="640080"/>
-          </a:xfrm>
-          <a:prstGeom prst="rect">
-            <a:avLst/>
-          </a:prstGeom>
-          <a:noFill/>
-        </p:spPr>
-        <p:txBody>
-          <a:bodyPr wrap="square" lIns="0" tIns="0" rIns="0" bIns="0" anchor="t">
-            <a:spAutoFit/>
-          </a:bodyPr>
-          <a:lstStyle/>
-          <a:p>
-            <a:pPr algn="l">
-              <a:spcAft>
-                <a:spcPts val="600"/>
-              </a:spcAft>
-            </a:pPr>
-            <a:r>
-              <a:rPr sz="1300" b="1">
-                <a:solidFill>
-                  <a:srgbClr val="B03A2E"/>
-                </a:solidFill>
-                <a:latin typeface="Microsoft JhengHei"/>
-              </a:rPr>
-              <a:t>蜜處理 漏抓</a:t>
-            </a:r>
-          </a:p>
-          <a:p>
-            <a:pPr algn="l">
-              <a:spcAft>
-                <a:spcPts val="600"/>
-              </a:spcAft>
-            </a:pPr>
-            <a:r>
-              <a:rPr sz="1300" b="1">
-                <a:solidFill>
-                  <a:srgbClr val="B03A2E"/>
-                </a:solidFill>
-                <a:latin typeface="Microsoft JhengHei"/>
-              </a:rPr>
-              <a:t>p_bad 0.405</a:t>
-            </a:r>
-          </a:p>
-        </p:txBody>
-      </p:sp>
-      <p:sp>
-        <p:nvSpPr>
-          <p:cNvPr id="19" name="TextBox 18"/>
-          <p:cNvSpPr txBox="1"/>
-          <p:nvPr/>
-        </p:nvSpPr>
-        <p:spPr>
-          <a:xfrm>
-            <a:off x="548640" y="6355080"/>
-            <a:ext cx="11064240" cy="365760"/>
-          </a:xfrm>
-          <a:prstGeom prst="rect">
-            <a:avLst/>
-          </a:prstGeom>
-          <a:noFill/>
-        </p:spPr>
-        <p:txBody>
-          <a:bodyPr wrap="square" lIns="0" tIns="0" rIns="0" bIns="0" anchor="t">
-            <a:spAutoFit/>
-          </a:bodyPr>
-          <a:lstStyle/>
-          <a:p>
-            <a:pPr algn="l">
-              <a:spcAft>
-                <a:spcPts val="600"/>
-              </a:spcAft>
-            </a:pPr>
-            <a:r>
-              <a:rPr sz="1200" b="0">
-                <a:solidFill>
-                  <a:srgbClr val="6B6B6B"/>
-                </a:solidFill>
-                <a:latin typeface="Microsoft JhengHei"/>
-              </a:rPr>
-              <a:t>p_bad 越低的漏抓，代表模型越「理直氣壯地錯」；水洗 0.089、0.119 兩張優先人工複查標籤。</a:t>
-            </a:r>
-          </a:p>
-        </p:txBody>
-      </p:sp>
-    </p:spTree>
-  </p:cSld>
-  <p:clrMapOvr>
-    <a:masterClrMapping/>
-  </p:clrMapOvr>
-</p:sld>
-</file>
-
-<file path=ppt/slides/slide11.xml><?xml version="1.0" encoding="utf-8"?>
-<p:sld xmlns:a="http://schemas.openxmlformats.org/drawingml/2006/main" xmlns:r="http://schemas.openxmlformats.org/officeDocument/2006/relationships" xmlns:p="http://schemas.openxmlformats.org/presentationml/2006/main">
-  <p:cSld>
-    <p:bg>
-      <p:bgPr>
-        <a:solidFill>
           <a:srgbClr val="2B1D14"/>
         </a:solidFill>
         <a:effectLst/>
@@ -4634,14 +3654,92 @@
               </a:spcAft>
             </a:pPr>
             <a:r>
-              <a:rPr sz="2000" b="0">
+              <a:rPr sz="2000" b="0" dirty="0" err="1">
                 <a:solidFill>
                   <a:srgbClr val="FFFFFF"/>
                 </a:solidFill>
                 <a:latin typeface="Microsoft JhengHei"/>
               </a:rPr>
-              <a:t>用驗證集 p_bad 分佈調整判定門檻，畫 ROC / PR 曲線；Grad-CAM 檢查模型注意位置</a:t>
-            </a:r>
+              <a:t>用驗證集</a:t>
+            </a:r>
+            <a:r>
+              <a:rPr sz="2000" b="0" dirty="0">
+                <a:solidFill>
+                  <a:srgbClr val="FFFFFF"/>
+                </a:solidFill>
+                <a:latin typeface="Microsoft JhengHei"/>
+              </a:rPr>
+              <a:t> </a:t>
+            </a:r>
+            <a:r>
+              <a:rPr sz="2000" b="0" dirty="0" err="1">
+                <a:solidFill>
+                  <a:srgbClr val="FFFFFF"/>
+                </a:solidFill>
+                <a:latin typeface="Microsoft JhengHei"/>
+              </a:rPr>
+              <a:t>p_bad</a:t>
+            </a:r>
+            <a:r>
+              <a:rPr sz="2000" b="0" dirty="0">
+                <a:solidFill>
+                  <a:srgbClr val="FFFFFF"/>
+                </a:solidFill>
+                <a:latin typeface="Microsoft JhengHei"/>
+              </a:rPr>
+              <a:t> </a:t>
+            </a:r>
+            <a:r>
+              <a:rPr sz="2000" b="0" dirty="0" err="1">
+                <a:solidFill>
+                  <a:srgbClr val="FFFFFF"/>
+                </a:solidFill>
+                <a:latin typeface="Microsoft JhengHei"/>
+              </a:rPr>
+              <a:t>分佈調整判定門檻，畫</a:t>
+            </a:r>
+            <a:r>
+              <a:rPr sz="2000" b="0" dirty="0">
+                <a:solidFill>
+                  <a:srgbClr val="FFFFFF"/>
+                </a:solidFill>
+                <a:latin typeface="Microsoft JhengHei"/>
+              </a:rPr>
+              <a:t> ROC / PR </a:t>
+            </a:r>
+            <a:r>
+              <a:rPr sz="2000" b="0" dirty="0" err="1">
+                <a:solidFill>
+                  <a:srgbClr val="FFFFFF"/>
+                </a:solidFill>
+                <a:latin typeface="Microsoft JhengHei"/>
+              </a:rPr>
+              <a:t>曲線；Grad-CAM</a:t>
+            </a:r>
+            <a:r>
+              <a:rPr sz="2000" b="0" dirty="0">
+                <a:solidFill>
+                  <a:srgbClr val="FFFFFF"/>
+                </a:solidFill>
+                <a:latin typeface="Microsoft JhengHei"/>
+              </a:rPr>
+              <a:t> </a:t>
+            </a:r>
+            <a:r>
+              <a:rPr sz="2000" b="0" dirty="0" err="1">
+                <a:solidFill>
+                  <a:srgbClr val="FFFFFF"/>
+                </a:solidFill>
+                <a:latin typeface="Microsoft JhengHei"/>
+              </a:rPr>
+              <a:t>檢查模型注意位置</a:t>
+            </a:r>
+            <a:endParaRPr sz="2000" b="0" dirty="0">
+              <a:solidFill>
+                <a:srgbClr val="FFFFFF"/>
+              </a:solidFill>
+              <a:latin typeface="Microsoft JhengHei"/>
+            </a:endParaRPr>
           </a:p>
         </p:txBody>
       </p:sp>
@@ -6378,7 +5476,7 @@
         <p:spPr>
           <a:xfrm>
             <a:off x="548640" y="4572000"/>
-            <a:ext cx="11064240" cy="457200"/>
+            <a:ext cx="11064240" cy="230832"/>
           </a:xfrm>
           <a:prstGeom prst="rect">
             <a:avLst/>
@@ -6397,14 +5495,47 @@
               </a:spcAft>
             </a:pPr>
             <a:r>
-              <a:rPr sz="1500" b="0">
+              <a:rPr sz="1500" b="0" dirty="0">
                 <a:solidFill>
                   <a:srgbClr val="2B2B2B"/>
                 </a:solidFill>
                 <a:latin typeface="Microsoft JhengHei"/>
               </a:rPr>
-              <a:t>• 逐顆人工挑選、單顆單獨拍攝，標籤由資料夾名稱 good / bad 取得</a:t>
-            </a:r>
+              <a:t>• </a:t>
+            </a:r>
+            <a:r>
+              <a:rPr sz="1500" b="0" dirty="0" err="1">
+                <a:solidFill>
+                  <a:srgbClr val="2B2B2B"/>
+                </a:solidFill>
+                <a:latin typeface="Microsoft JhengHei"/>
+              </a:rPr>
+              <a:t>逐顆挑選、單顆單獨拍攝，標籤由資料夾名稱</a:t>
+            </a:r>
+            <a:r>
+              <a:rPr sz="1500" b="0" dirty="0">
+                <a:solidFill>
+                  <a:srgbClr val="2B2B2B"/>
+                </a:solidFill>
+                <a:latin typeface="Microsoft JhengHei"/>
+              </a:rPr>
+              <a:t> good / bad </a:t>
+            </a:r>
+            <a:r>
+              <a:rPr sz="1500" b="0" dirty="0" err="1">
+                <a:solidFill>
+                  <a:srgbClr val="2B2B2B"/>
+                </a:solidFill>
+                <a:latin typeface="Microsoft JhengHei"/>
+              </a:rPr>
+              <a:t>取得</a:t>
+            </a:r>
+            <a:endParaRPr sz="1500" b="0" dirty="0">
+              <a:solidFill>
+                <a:srgbClr val="2B2B2B"/>
+              </a:solidFill>
+              <a:latin typeface="Microsoft JhengHei"/>
+            </a:endParaRPr>
           </a:p>
         </p:txBody>
       </p:sp>
@@ -6495,7 +5626,7 @@
         <p:spPr>
           <a:xfrm>
             <a:off x="548640" y="5998464"/>
-            <a:ext cx="11064240" cy="457200"/>
+            <a:ext cx="11064240" cy="230832"/>
           </a:xfrm>
           <a:prstGeom prst="rect">
             <a:avLst/>
@@ -6514,13 +5645,13 @@
               </a:spcAft>
             </a:pPr>
             <a:r>
-              <a:rPr sz="1500" b="0">
+              <a:rPr sz="1500" b="0" dirty="0">
                 <a:solidFill>
                   <a:srgbClr val="2B2B2B"/>
                 </a:solidFill>
                 <a:latin typeface="Microsoft JhengHei"/>
               </a:rPr>
-              <a:t>• good : bad 約 1 : 1，不需處理類別不均；日曬、蜜處理皆為 10/14 單日拍攝</a:t>
+              <a:t>• good : bad 約 1 : 1，不需處理類別不均；日曬、蜜處理皆為單日拍攝</a:t>
             </a:r>
           </a:p>
         </p:txBody>
@@ -6603,7 +5734,13 @@
           <p:cNvGraphicFramePr>
             <a:graphicFrameLocks noGrp="1"/>
           </p:cNvGraphicFramePr>
-          <p:nvPr/>
+          <p:nvPr>
+            <p:extLst>
+              <p:ext uri="{D42A27DB-BD31-4B8C-83A1-F6EECF244321}">
+                <p14:modId xmlns:p14="http://schemas.microsoft.com/office/powerpoint/2010/main" val="2250065074"/>
+              </p:ext>
+            </p:extLst>
+          </p:nvPr>
         </p:nvGraphicFramePr>
         <p:xfrm>
           <a:off x="548640" y="1463040"/>
@@ -6915,13 +6052,22 @@
                     <a:lstStyle/>
                     <a:p>
                       <a:r>
-                        <a:rPr sz="1600">
+                        <a:rPr sz="1600" dirty="0" err="1">
                           <a:solidFill>
                             <a:srgbClr val="2B2B2B"/>
                           </a:solidFill>
                           <a:latin typeface="Microsoft JhengHei"/>
                         </a:rPr>
-                        <a:t>CrossEntropy，label smoothing 0.1，類別權重</a:t>
+                        <a:t>CrossEntropy，label</a:t>
+                      </a:r>
+                      <a:r>
+                        <a:rPr sz="1600" dirty="0">
+                          <a:solidFill>
+                            <a:srgbClr val="2B2B2B"/>
+                          </a:solidFill>
+                          <a:latin typeface="Microsoft JhengHei"/>
+                        </a:rPr>
+                        <a:t> smoothing 0.1</a:t>
                       </a:r>
                     </a:p>
                   </a:txBody>
@@ -7119,13 +6265,31 @@
                     <a:lstStyle/>
                     <a:p>
                       <a:r>
-                        <a:rPr sz="1600">
+                        <a:rPr sz="1600" dirty="0">
                           <a:solidFill>
                             <a:srgbClr val="2B2B2B"/>
                           </a:solidFill>
                           <a:latin typeface="Microsoft JhengHei"/>
                         </a:rPr>
-                        <a:t>seed 42；GPU 自動啟用混合精度 (AMP)</a:t>
+                        <a:t>seed 42；GPU </a:t>
+                      </a:r>
+                      <a:r>
+                        <a:rPr sz="1600" dirty="0" err="1">
+                          <a:solidFill>
+                            <a:srgbClr val="2B2B2B"/>
+                          </a:solidFill>
+                          <a:latin typeface="Microsoft JhengHei"/>
+                        </a:rPr>
+                        <a:t>自動啟用混合精度</a:t>
+                      </a:r>
+                      <a:r>
+                        <a:rPr sz="1600" dirty="0">
+                          <a:solidFill>
+                            <a:srgbClr val="2B2B2B"/>
+                          </a:solidFill>
+                          <a:latin typeface="Microsoft JhengHei"/>
+                        </a:rPr>
+                        <a:t> (AMP)</a:t>
                       </a:r>
                     </a:p>
                   </a:txBody>
@@ -8280,7 +7444,7 @@
         <p:spPr>
           <a:xfrm>
             <a:off x="548640" y="4846320"/>
-            <a:ext cx="5486400" cy="1554480"/>
+            <a:ext cx="5486400" cy="723275"/>
           </a:xfrm>
           <a:prstGeom prst="rect">
             <a:avLst/>
@@ -8299,13 +7463,40 @@
               </a:spcAft>
             </a:pPr>
             <a:r>
-              <a:rPr sz="1400" b="0">
+              <a:rPr sz="1400" b="0" dirty="0" err="1">
                 <a:solidFill>
                   <a:srgbClr val="6B6B6B"/>
                 </a:solidFill>
                 <a:latin typeface="Microsoft JhengHei"/>
               </a:rPr>
-              <a:t>p_bad = 模型認為是壞豆的機率，不論判成哪一類都會給。</a:t>
+              <a:t>p_bad</a:t>
+            </a:r>
+            <a:r>
+              <a:rPr sz="1400" b="0" dirty="0">
+                <a:solidFill>
+                  <a:srgbClr val="6B6B6B"/>
+                </a:solidFill>
+                <a:latin typeface="Microsoft JhengHei"/>
+              </a:rPr>
+              <a:t> = </a:t>
+            </a:r>
+            <a:r>
+              <a:rPr sz="1400" b="0" dirty="0" err="1">
+                <a:solidFill>
+                  <a:srgbClr val="6B6B6B"/>
+                </a:solidFill>
+                <a:latin typeface="Microsoft JhengHei"/>
+              </a:rPr>
+              <a:t>模型認為是壞豆的機率，不論判成哪一類都會給</a:t>
+            </a:r>
+            <a:r>
+              <a:rPr sz="1400" b="0" dirty="0">
+                <a:solidFill>
+                  <a:srgbClr val="6B6B6B"/>
+                </a:solidFill>
+                <a:latin typeface="Microsoft JhengHei"/>
+              </a:rPr>
+              <a:t>。</a:t>
             </a:r>
           </a:p>
           <a:p>
@@ -8315,13 +7506,58 @@
               </a:spcAft>
             </a:pPr>
             <a:r>
-              <a:rPr sz="1400" b="0">
+              <a:rPr sz="1400" b="0" dirty="0" err="1">
                 <a:solidFill>
                   <a:srgbClr val="6B6B6B"/>
                 </a:solidFill>
                 <a:latin typeface="Microsoft JhengHei"/>
               </a:rPr>
-              <a:t>可自訂門檻（如 p_bad &gt; 0.3）減少漏抓，或把 0.3~0.7 的豆子交人工複檢。</a:t>
+              <a:t>可自訂門檻（如</a:t>
+            </a:r>
+            <a:r>
+              <a:rPr sz="1400" b="0" dirty="0">
+                <a:solidFill>
+                  <a:srgbClr val="6B6B6B"/>
+                </a:solidFill>
+                <a:latin typeface="Microsoft JhengHei"/>
+              </a:rPr>
+              <a:t> </a:t>
+            </a:r>
+            <a:r>
+              <a:rPr sz="1400" b="0" dirty="0" err="1">
+                <a:solidFill>
+                  <a:srgbClr val="6B6B6B"/>
+                </a:solidFill>
+                <a:latin typeface="Microsoft JhengHei"/>
+              </a:rPr>
+              <a:t>p_bad</a:t>
+            </a:r>
+            <a:r>
+              <a:rPr sz="1400" b="0" dirty="0">
+                <a:solidFill>
+                  <a:srgbClr val="6B6B6B"/>
+                </a:solidFill>
+                <a:latin typeface="Microsoft JhengHei"/>
+              </a:rPr>
+              <a:t> &gt; 0.3）減少漏抓，或把 0.3~0.7 </a:t>
+            </a:r>
+            <a:r>
+              <a:rPr sz="1400" b="0" dirty="0" err="1">
+                <a:solidFill>
+                  <a:srgbClr val="6B6B6B"/>
+                </a:solidFill>
+                <a:latin typeface="Microsoft JhengHei"/>
+              </a:rPr>
+              <a:t>的豆子交人工複檢</a:t>
+            </a:r>
+            <a:r>
+              <a:rPr sz="1400" b="0" dirty="0">
+                <a:solidFill>
+                  <a:srgbClr val="6B6B6B"/>
+                </a:solidFill>
+                <a:latin typeface="Microsoft JhengHei"/>
+              </a:rPr>
+              <a:t>。</a:t>
             </a:r>
           </a:p>
         </p:txBody>
@@ -8354,13 +7590,22 @@
               </a:spcAft>
             </a:pPr>
             <a:r>
-              <a:rPr sz="1400" b="0">
+              <a:rPr sz="1400" b="0" dirty="0" err="1">
                 <a:solidFill>
                   <a:srgbClr val="6B6B6B"/>
                 </a:solidFill>
                 <a:latin typeface="Microsoft JhengHei"/>
               </a:rPr>
-              <a:t>漏抓（壞豆判成好豆）比誤判嚴重，所以分開列出。</a:t>
+              <a:t>漏抓（壞豆判成好豆）比誤判嚴重，所以分開列出</a:t>
+            </a:r>
+            <a:r>
+              <a:rPr sz="1400" b="0" dirty="0">
+                <a:solidFill>
+                  <a:srgbClr val="6B6B6B"/>
+                </a:solidFill>
+                <a:latin typeface="Microsoft JhengHei"/>
+              </a:rPr>
+              <a:t>。</a:t>
             </a:r>
           </a:p>
         </p:txBody>
@@ -8908,471 +8153,45 @@
                 </a:solidFill>
                 <a:latin typeface="Microsoft JhengHei"/>
               </a:rPr>
-              <a:t>三種處理法比較</a:t>
-            </a:r>
-          </a:p>
-        </p:txBody>
-      </p:sp>
-      <p:graphicFrame>
-        <p:nvGraphicFramePr>
-          <p:cNvPr id="3" name="Chart 2"/>
-          <p:cNvGraphicFramePr>
-            <a:graphicFrameLocks noGrp="1"/>
-          </p:cNvGraphicFramePr>
+              <a:t>被判錯的照片（test 集）</a:t>
+            </a:r>
+          </a:p>
+        </p:txBody>
+      </p:sp>
+      <p:pic>
+        <p:nvPicPr>
+          <p:cNvPr id="3" name="Picture 2" descr="water_missed_0.089_P_20261007_205845.jpg"/>
+          <p:cNvPicPr>
+            <a:picLocks noChangeAspect="1"/>
+          </p:cNvPicPr>
           <p:nvPr/>
-        </p:nvGraphicFramePr>
-        <p:xfrm>
-          <a:off x="457200" y="1371600"/>
-          <a:ext cx="5669280" cy="4937760"/>
-        </p:xfrm>
-        <a:graphic>
-          <a:graphicData uri="http://schemas.openxmlformats.org/drawingml/2006/chart">
-            <c:chart xmlns:c="http://schemas.openxmlformats.org/drawingml/2006/chart" xmlns:r="http://schemas.openxmlformats.org/officeDocument/2006/relationships" r:id="rId2"/>
-          </a:graphicData>
-        </a:graphic>
-      </p:graphicFrame>
-      <p:graphicFrame>
-        <p:nvGraphicFramePr>
-          <p:cNvPr id="4" name="Table 3"/>
-          <p:cNvGraphicFramePr>
-            <a:graphicFrameLocks noGrp="1"/>
-          </p:cNvGraphicFramePr>
-          <p:nvPr/>
-        </p:nvGraphicFramePr>
-        <p:xfrm>
-          <a:off x="6400800" y="1554480"/>
-          <a:ext cx="5303520" cy="2011680"/>
-        </p:xfrm>
-        <a:graphic>
-          <a:graphicData uri="http://schemas.openxmlformats.org/drawingml/2006/table">
-            <a:tbl>
-              <a:tblPr firstRow="1" bandRow="1">
-                <a:tableStyleId>{5C22544A-7EE6-4342-B048-85BDC9FD1C3A}</a:tableStyleId>
-              </a:tblPr>
-              <a:tblGrid>
-                <a:gridCol w="1371600">
-                  <a:extLst>
-                    <a:ext uri="{9D8B030D-6E8A-4147-A177-3AD203B41FA5}">
-                      <a16:colId xmlns:a16="http://schemas.microsoft.com/office/drawing/2014/main" val="20000"/>
-                    </a:ext>
-                  </a:extLst>
-                </a:gridCol>
-                <a:gridCol w="1280160">
-                  <a:extLst>
-                    <a:ext uri="{9D8B030D-6E8A-4147-A177-3AD203B41FA5}">
-                      <a16:colId xmlns:a16="http://schemas.microsoft.com/office/drawing/2014/main" val="20001"/>
-                    </a:ext>
-                  </a:extLst>
-                </a:gridCol>
-                <a:gridCol w="1280160">
-                  <a:extLst>
-                    <a:ext uri="{9D8B030D-6E8A-4147-A177-3AD203B41FA5}">
-                      <a16:colId xmlns:a16="http://schemas.microsoft.com/office/drawing/2014/main" val="20002"/>
-                    </a:ext>
-                  </a:extLst>
-                </a:gridCol>
-                <a:gridCol w="1371600">
-                  <a:extLst>
-                    <a:ext uri="{9D8B030D-6E8A-4147-A177-3AD203B41FA5}">
-                      <a16:colId xmlns:a16="http://schemas.microsoft.com/office/drawing/2014/main" val="20003"/>
-                    </a:ext>
-                  </a:extLst>
-                </a:gridCol>
-              </a:tblGrid>
-              <a:tr h="502920">
-                <a:tc>
-                  <a:txBody>
-                    <a:bodyPr/>
-                    <a:lstStyle/>
-                    <a:p>
-                      <a:r>
-                        <a:rPr sz="1400" b="1">
-                          <a:solidFill>
-                            <a:srgbClr val="FFFFFF"/>
-                          </a:solidFill>
-                          <a:latin typeface="Microsoft JhengHei"/>
-                        </a:rPr>
-                        <a:t>處理法</a:t>
-                      </a:r>
-                    </a:p>
-                  </a:txBody>
-                  <a:tcPr anchor="ctr">
-                    <a:solidFill>
-                      <a:srgbClr val="2B1D14"/>
-                    </a:solidFill>
-                  </a:tcPr>
-                </a:tc>
-                <a:tc>
-                  <a:txBody>
-                    <a:bodyPr/>
-                    <a:lstStyle/>
-                    <a:p>
-                      <a:r>
-                        <a:rPr sz="1400" b="1">
-                          <a:solidFill>
-                            <a:srgbClr val="FFFFFF"/>
-                          </a:solidFill>
-                          <a:latin typeface="Microsoft JhengHei"/>
-                        </a:rPr>
-                        <a:t>資料量</a:t>
-                      </a:r>
-                    </a:p>
-                  </a:txBody>
-                  <a:tcPr anchor="ctr">
-                    <a:solidFill>
-                      <a:srgbClr val="2B1D14"/>
-                    </a:solidFill>
-                  </a:tcPr>
-                </a:tc>
-                <a:tc>
-                  <a:txBody>
-                    <a:bodyPr/>
-                    <a:lstStyle/>
-                    <a:p>
-                      <a:r>
-                        <a:rPr sz="1400" b="1">
-                          <a:solidFill>
-                            <a:srgbClr val="FFFFFF"/>
-                          </a:solidFill>
-                          <a:latin typeface="Microsoft JhengHei"/>
-                        </a:rPr>
-                        <a:t>test Acc</a:t>
-                      </a:r>
-                    </a:p>
-                  </a:txBody>
-                  <a:tcPr anchor="ctr">
-                    <a:solidFill>
-                      <a:srgbClr val="2B1D14"/>
-                    </a:solidFill>
-                  </a:tcPr>
-                </a:tc>
-                <a:tc>
-                  <a:txBody>
-                    <a:bodyPr/>
-                    <a:lstStyle/>
-                    <a:p>
-                      <a:r>
-                        <a:rPr sz="1400" b="1">
-                          <a:solidFill>
-                            <a:srgbClr val="FFFFFF"/>
-                          </a:solidFill>
-                          <a:latin typeface="Microsoft JhengHei"/>
-                        </a:rPr>
-                        <a:t>漏抓 / 誤判</a:t>
-                      </a:r>
-                    </a:p>
-                  </a:txBody>
-                  <a:tcPr anchor="ctr">
-                    <a:solidFill>
-                      <a:srgbClr val="2B1D14"/>
-                    </a:solidFill>
-                  </a:tcPr>
-                </a:tc>
-                <a:extLst>
-                  <a:ext uri="{0D108BD9-81ED-4DB2-BD59-A6C34878D82A}">
-                    <a16:rowId xmlns:a16="http://schemas.microsoft.com/office/drawing/2014/main" val="10000"/>
-                  </a:ext>
-                </a:extLst>
-              </a:tr>
-              <a:tr h="502920">
-                <a:tc>
-                  <a:txBody>
-                    <a:bodyPr/>
-                    <a:lstStyle/>
-                    <a:p>
-                      <a:r>
-                        <a:rPr sz="1400">
-                          <a:solidFill>
-                            <a:srgbClr val="2B2B2B"/>
-                          </a:solidFill>
-                          <a:latin typeface="Microsoft JhengHei"/>
-                        </a:rPr>
-                        <a:t>水洗</a:t>
-                      </a:r>
-                    </a:p>
-                  </a:txBody>
-                  <a:tcPr anchor="ctr">
-                    <a:solidFill>
-                      <a:srgbClr val="FFFFFF"/>
-                    </a:solidFill>
-                  </a:tcPr>
-                </a:tc>
-                <a:tc>
-                  <a:txBody>
-                    <a:bodyPr/>
-                    <a:lstStyle/>
-                    <a:p>
-                      <a:r>
-                        <a:rPr sz="1400">
-                          <a:solidFill>
-                            <a:srgbClr val="2B2B2B"/>
-                          </a:solidFill>
-                          <a:latin typeface="Microsoft JhengHei"/>
-                        </a:rPr>
-                        <a:t>1,346</a:t>
-                      </a:r>
-                    </a:p>
-                  </a:txBody>
-                  <a:tcPr anchor="ctr">
-                    <a:solidFill>
-                      <a:srgbClr val="FFFFFF"/>
-                    </a:solidFill>
-                  </a:tcPr>
-                </a:tc>
-                <a:tc>
-                  <a:txBody>
-                    <a:bodyPr/>
-                    <a:lstStyle/>
-                    <a:p>
-                      <a:r>
-                        <a:rPr sz="1400">
-                          <a:solidFill>
-                            <a:srgbClr val="2B2B2B"/>
-                          </a:solidFill>
-                          <a:latin typeface="Microsoft JhengHei"/>
-                        </a:rPr>
-                        <a:t>97.0%</a:t>
-                      </a:r>
-                    </a:p>
-                  </a:txBody>
-                  <a:tcPr anchor="ctr">
-                    <a:solidFill>
-                      <a:srgbClr val="FFFFFF"/>
-                    </a:solidFill>
-                  </a:tcPr>
-                </a:tc>
-                <a:tc>
-                  <a:txBody>
-                    <a:bodyPr/>
-                    <a:lstStyle/>
-                    <a:p>
-                      <a:r>
-                        <a:rPr sz="1400">
-                          <a:solidFill>
-                            <a:srgbClr val="2B2B2B"/>
-                          </a:solidFill>
-                          <a:latin typeface="Microsoft JhengHei"/>
-                        </a:rPr>
-                        <a:t>5 / 1</a:t>
-                      </a:r>
-                    </a:p>
-                  </a:txBody>
-                  <a:tcPr anchor="ctr">
-                    <a:solidFill>
-                      <a:srgbClr val="FFFFFF"/>
-                    </a:solidFill>
-                  </a:tcPr>
-                </a:tc>
-                <a:extLst>
-                  <a:ext uri="{0D108BD9-81ED-4DB2-BD59-A6C34878D82A}">
-                    <a16:rowId xmlns:a16="http://schemas.microsoft.com/office/drawing/2014/main" val="10001"/>
-                  </a:ext>
-                </a:extLst>
-              </a:tr>
-              <a:tr h="502920">
-                <a:tc>
-                  <a:txBody>
-                    <a:bodyPr/>
-                    <a:lstStyle/>
-                    <a:p>
-                      <a:r>
-                        <a:rPr sz="1400">
-                          <a:solidFill>
-                            <a:srgbClr val="2B2B2B"/>
-                          </a:solidFill>
-                          <a:latin typeface="Microsoft JhengHei"/>
-                        </a:rPr>
-                        <a:t>日曬</a:t>
-                      </a:r>
-                    </a:p>
-                  </a:txBody>
-                  <a:tcPr anchor="ctr">
-                    <a:solidFill>
-                      <a:srgbClr val="F3F0EC"/>
-                    </a:solidFill>
-                  </a:tcPr>
-                </a:tc>
-                <a:tc>
-                  <a:txBody>
-                    <a:bodyPr/>
-                    <a:lstStyle/>
-                    <a:p>
-                      <a:r>
-                        <a:rPr sz="1400">
-                          <a:solidFill>
-                            <a:srgbClr val="2B2B2B"/>
-                          </a:solidFill>
-                          <a:latin typeface="Microsoft JhengHei"/>
-                        </a:rPr>
-                        <a:t>1,015</a:t>
-                      </a:r>
-                    </a:p>
-                  </a:txBody>
-                  <a:tcPr anchor="ctr">
-                    <a:solidFill>
-                      <a:srgbClr val="F3F0EC"/>
-                    </a:solidFill>
-                  </a:tcPr>
-                </a:tc>
-                <a:tc>
-                  <a:txBody>
-                    <a:bodyPr/>
-                    <a:lstStyle/>
-                    <a:p>
-                      <a:r>
-                        <a:rPr sz="1400">
-                          <a:solidFill>
-                            <a:srgbClr val="2B2B2B"/>
-                          </a:solidFill>
-                          <a:latin typeface="Microsoft JhengHei"/>
-                        </a:rPr>
-                        <a:t>99.3%</a:t>
-                      </a:r>
-                    </a:p>
-                  </a:txBody>
-                  <a:tcPr anchor="ctr">
-                    <a:solidFill>
-                      <a:srgbClr val="F3F0EC"/>
-                    </a:solidFill>
-                  </a:tcPr>
-                </a:tc>
-                <a:tc>
-                  <a:txBody>
-                    <a:bodyPr/>
-                    <a:lstStyle/>
-                    <a:p>
-                      <a:r>
-                        <a:rPr sz="1400">
-                          <a:solidFill>
-                            <a:srgbClr val="2B2B2B"/>
-                          </a:solidFill>
-                          <a:latin typeface="Microsoft JhengHei"/>
-                        </a:rPr>
-                        <a:t>1 / 0</a:t>
-                      </a:r>
-                    </a:p>
-                  </a:txBody>
-                  <a:tcPr anchor="ctr">
-                    <a:solidFill>
-                      <a:srgbClr val="F3F0EC"/>
-                    </a:solidFill>
-                  </a:tcPr>
-                </a:tc>
-                <a:extLst>
-                  <a:ext uri="{0D108BD9-81ED-4DB2-BD59-A6C34878D82A}">
-                    <a16:rowId xmlns:a16="http://schemas.microsoft.com/office/drawing/2014/main" val="10002"/>
-                  </a:ext>
-                </a:extLst>
-              </a:tr>
-              <a:tr h="502920">
-                <a:tc>
-                  <a:txBody>
-                    <a:bodyPr/>
-                    <a:lstStyle/>
-                    <a:p>
-                      <a:r>
-                        <a:rPr sz="1400">
-                          <a:solidFill>
-                            <a:srgbClr val="2B2B2B"/>
-                          </a:solidFill>
-                          <a:latin typeface="Microsoft JhengHei"/>
-                        </a:rPr>
-                        <a:t>蜜處理</a:t>
-                      </a:r>
-                    </a:p>
-                  </a:txBody>
-                  <a:tcPr anchor="ctr">
-                    <a:solidFill>
-                      <a:srgbClr val="FFFFFF"/>
-                    </a:solidFill>
-                  </a:tcPr>
-                </a:tc>
-                <a:tc>
-                  <a:txBody>
-                    <a:bodyPr/>
-                    <a:lstStyle/>
-                    <a:p>
-                      <a:r>
-                        <a:rPr sz="1400">
-                          <a:solidFill>
-                            <a:srgbClr val="2B2B2B"/>
-                          </a:solidFill>
-                          <a:latin typeface="Microsoft JhengHei"/>
-                        </a:rPr>
-                        <a:t>1,012</a:t>
-                      </a:r>
-                    </a:p>
-                  </a:txBody>
-                  <a:tcPr anchor="ctr">
-                    <a:solidFill>
-                      <a:srgbClr val="FFFFFF"/>
-                    </a:solidFill>
-                  </a:tcPr>
-                </a:tc>
-                <a:tc>
-                  <a:txBody>
-                    <a:bodyPr/>
-                    <a:lstStyle/>
-                    <a:p>
-                      <a:r>
-                        <a:rPr sz="1400">
-                          <a:solidFill>
-                            <a:srgbClr val="2B2B2B"/>
-                          </a:solidFill>
-                          <a:latin typeface="Microsoft JhengHei"/>
-                        </a:rPr>
-                        <a:t>99.3%</a:t>
-                      </a:r>
-                    </a:p>
-                  </a:txBody>
-                  <a:tcPr anchor="ctr">
-                    <a:solidFill>
-                      <a:srgbClr val="FFFFFF"/>
-                    </a:solidFill>
-                  </a:tcPr>
-                </a:tc>
-                <a:tc>
-                  <a:txBody>
-                    <a:bodyPr/>
-                    <a:lstStyle/>
-                    <a:p>
-                      <a:r>
-                        <a:rPr sz="1400">
-                          <a:solidFill>
-                            <a:srgbClr val="2B2B2B"/>
-                          </a:solidFill>
-                          <a:latin typeface="Microsoft JhengHei"/>
-                        </a:rPr>
-                        <a:t>1 / 0</a:t>
-                      </a:r>
-                    </a:p>
-                  </a:txBody>
-                  <a:tcPr anchor="ctr">
-                    <a:solidFill>
-                      <a:srgbClr val="FFFFFF"/>
-                    </a:solidFill>
-                  </a:tcPr>
-                </a:tc>
-                <a:extLst>
-                  <a:ext uri="{0D108BD9-81ED-4DB2-BD59-A6C34878D82A}">
-                    <a16:rowId xmlns:a16="http://schemas.microsoft.com/office/drawing/2014/main" val="10003"/>
-                  </a:ext>
-                </a:extLst>
-              </a:tr>
-            </a:tbl>
-          </a:graphicData>
-        </a:graphic>
-      </p:graphicFrame>
-      <p:sp>
-        <p:nvSpPr>
-          <p:cNvPr id="5" name="TextBox 4"/>
+        </p:nvPicPr>
+        <p:blipFill>
+          <a:blip r:embed="rId2"/>
+          <a:stretch>
+            <a:fillRect/>
+          </a:stretch>
+        </p:blipFill>
+        <p:spPr>
+          <a:xfrm>
+            <a:off x="548640" y="1234440"/>
+            <a:ext cx="1828800" cy="1828800"/>
+          </a:xfrm>
+          <a:prstGeom prst="rect">
+            <a:avLst/>
+          </a:prstGeom>
+        </p:spPr>
+      </p:pic>
+      <p:sp>
+        <p:nvSpPr>
+          <p:cNvPr id="4" name="TextBox 3"/>
           <p:cNvSpPr txBox="1"/>
           <p:nvPr/>
         </p:nvSpPr>
         <p:spPr>
           <a:xfrm>
-            <a:off x="6400800" y="3840480"/>
-            <a:ext cx="5303520" cy="2560320"/>
+            <a:off x="548640" y="3108960"/>
+            <a:ext cx="2560320" cy="640080"/>
           </a:xfrm>
           <a:prstGeom prst="rect">
             <a:avLst/>
@@ -9391,13 +8210,13 @@
               </a:spcAft>
             </a:pPr>
             <a:r>
-              <a:rPr sz="1400" b="0">
-                <a:solidFill>
-                  <a:srgbClr val="2B2B2B"/>
+              <a:rPr sz="1300" b="1">
+                <a:solidFill>
+                  <a:srgbClr val="B03A2E"/>
                 </a:solidFill>
                 <a:latin typeface="Microsoft JhengHei"/>
               </a:rPr>
-              <a:t>日曬、蜜處理反而比水洗準，但不宜直接解讀為比較好分：</a:t>
+              <a:t>水洗 漏抓</a:t>
             </a:r>
           </a:p>
           <a:p>
@@ -9407,15 +8226,62 @@
               </a:spcAft>
             </a:pPr>
             <a:r>
-              <a:rPr sz="1400" b="0">
-                <a:solidFill>
-                  <a:srgbClr val="2B2B2B"/>
+              <a:rPr sz="1300" b="1">
+                <a:solidFill>
+                  <a:srgbClr val="B03A2E"/>
                 </a:solidFill>
                 <a:latin typeface="Microsoft JhengHei"/>
               </a:rPr>
-              <a:t>① 兩批只在單一天、單一條件拍攝，train 與 test 條件幾乎相同</a:t>
-            </a:r>
-          </a:p>
+              <a:t>p_bad 0.089</a:t>
+            </a:r>
+          </a:p>
+        </p:txBody>
+      </p:sp>
+      <p:pic>
+        <p:nvPicPr>
+          <p:cNvPr id="5" name="Picture 4" descr="water_missed_0.119_P_20261007_210823.jpg"/>
+          <p:cNvPicPr>
+            <a:picLocks noChangeAspect="1"/>
+          </p:cNvPicPr>
+          <p:nvPr/>
+        </p:nvPicPr>
+        <p:blipFill>
+          <a:blip r:embed="rId3"/>
+          <a:stretch>
+            <a:fillRect/>
+          </a:stretch>
+        </p:blipFill>
+        <p:spPr>
+          <a:xfrm>
+            <a:off x="3364992" y="1234440"/>
+            <a:ext cx="1828800" cy="1828800"/>
+          </a:xfrm>
+          <a:prstGeom prst="rect">
+            <a:avLst/>
+          </a:prstGeom>
+        </p:spPr>
+      </p:pic>
+      <p:sp>
+        <p:nvSpPr>
+          <p:cNvPr id="6" name="TextBox 5"/>
+          <p:cNvSpPr txBox="1"/>
+          <p:nvPr/>
+        </p:nvSpPr>
+        <p:spPr>
+          <a:xfrm>
+            <a:off x="3364992" y="3108960"/>
+            <a:ext cx="2560320" cy="640080"/>
+          </a:xfrm>
+          <a:prstGeom prst="rect">
+            <a:avLst/>
+          </a:prstGeom>
+          <a:noFill/>
+        </p:spPr>
+        <p:txBody>
+          <a:bodyPr wrap="square" lIns="0" tIns="0" rIns="0" bIns="0" anchor="t">
+            <a:spAutoFit/>
+          </a:bodyPr>
+          <a:lstStyle/>
           <a:p>
             <a:pPr algn="l">
               <a:spcAft>
@@ -9423,13 +8289,503 @@
               </a:spcAft>
             </a:pPr>
             <a:r>
-              <a:rPr sz="1400" b="0">
-                <a:solidFill>
-                  <a:srgbClr val="2B2B2B"/>
+              <a:rPr sz="1300" b="1">
+                <a:solidFill>
+                  <a:srgbClr val="B03A2E"/>
                 </a:solidFill>
                 <a:latin typeface="Microsoft JhengHei"/>
               </a:rPr>
-              <a:t>② test 僅約 150~200 張，錯 1 張差約 0.5~0.7 個百分點，差距在統計上不顯著</a:t>
+              <a:t>水洗 漏抓</a:t>
+            </a:r>
+          </a:p>
+          <a:p>
+            <a:pPr algn="l">
+              <a:spcAft>
+                <a:spcPts val="600"/>
+              </a:spcAft>
+            </a:pPr>
+            <a:r>
+              <a:rPr sz="1300" b="1">
+                <a:solidFill>
+                  <a:srgbClr val="B03A2E"/>
+                </a:solidFill>
+                <a:latin typeface="Microsoft JhengHei"/>
+              </a:rPr>
+              <a:t>p_bad 0.119</a:t>
+            </a:r>
+          </a:p>
+        </p:txBody>
+      </p:sp>
+      <p:pic>
+        <p:nvPicPr>
+          <p:cNvPr id="7" name="Picture 6" descr="water_missed_0.417_P_20261008_151908.jpg"/>
+          <p:cNvPicPr>
+            <a:picLocks noChangeAspect="1"/>
+          </p:cNvPicPr>
+          <p:nvPr/>
+        </p:nvPicPr>
+        <p:blipFill>
+          <a:blip r:embed="rId4"/>
+          <a:stretch>
+            <a:fillRect/>
+          </a:stretch>
+        </p:blipFill>
+        <p:spPr>
+          <a:xfrm>
+            <a:off x="6181344" y="1234440"/>
+            <a:ext cx="1828800" cy="1828800"/>
+          </a:xfrm>
+          <a:prstGeom prst="rect">
+            <a:avLst/>
+          </a:prstGeom>
+        </p:spPr>
+      </p:pic>
+      <p:sp>
+        <p:nvSpPr>
+          <p:cNvPr id="8" name="TextBox 7"/>
+          <p:cNvSpPr txBox="1"/>
+          <p:nvPr/>
+        </p:nvSpPr>
+        <p:spPr>
+          <a:xfrm>
+            <a:off x="6181344" y="3108960"/>
+            <a:ext cx="2560320" cy="640080"/>
+          </a:xfrm>
+          <a:prstGeom prst="rect">
+            <a:avLst/>
+          </a:prstGeom>
+          <a:noFill/>
+        </p:spPr>
+        <p:txBody>
+          <a:bodyPr wrap="square" lIns="0" tIns="0" rIns="0" bIns="0" anchor="t">
+            <a:spAutoFit/>
+          </a:bodyPr>
+          <a:lstStyle/>
+          <a:p>
+            <a:pPr algn="l">
+              <a:spcAft>
+                <a:spcPts val="600"/>
+              </a:spcAft>
+            </a:pPr>
+            <a:r>
+              <a:rPr sz="1300" b="1">
+                <a:solidFill>
+                  <a:srgbClr val="B03A2E"/>
+                </a:solidFill>
+                <a:latin typeface="Microsoft JhengHei"/>
+              </a:rPr>
+              <a:t>水洗 漏抓</a:t>
+            </a:r>
+          </a:p>
+          <a:p>
+            <a:pPr algn="l">
+              <a:spcAft>
+                <a:spcPts val="600"/>
+              </a:spcAft>
+            </a:pPr>
+            <a:r>
+              <a:rPr sz="1300" b="1">
+                <a:solidFill>
+                  <a:srgbClr val="B03A2E"/>
+                </a:solidFill>
+                <a:latin typeface="Microsoft JhengHei"/>
+              </a:rPr>
+              <a:t>p_bad 0.417</a:t>
+            </a:r>
+          </a:p>
+        </p:txBody>
+      </p:sp>
+      <p:pic>
+        <p:nvPicPr>
+          <p:cNvPr id="9" name="Picture 8" descr="water_missed_0.453_P_20261008_145418.jpg"/>
+          <p:cNvPicPr>
+            <a:picLocks noChangeAspect="1"/>
+          </p:cNvPicPr>
+          <p:nvPr/>
+        </p:nvPicPr>
+        <p:blipFill>
+          <a:blip r:embed="rId5"/>
+          <a:stretch>
+            <a:fillRect/>
+          </a:stretch>
+        </p:blipFill>
+        <p:spPr>
+          <a:xfrm>
+            <a:off x="8997696" y="1234440"/>
+            <a:ext cx="1828800" cy="1828800"/>
+          </a:xfrm>
+          <a:prstGeom prst="rect">
+            <a:avLst/>
+          </a:prstGeom>
+        </p:spPr>
+      </p:pic>
+      <p:sp>
+        <p:nvSpPr>
+          <p:cNvPr id="10" name="TextBox 9"/>
+          <p:cNvSpPr txBox="1"/>
+          <p:nvPr/>
+        </p:nvSpPr>
+        <p:spPr>
+          <a:xfrm>
+            <a:off x="8997696" y="3108960"/>
+            <a:ext cx="2560320" cy="640080"/>
+          </a:xfrm>
+          <a:prstGeom prst="rect">
+            <a:avLst/>
+          </a:prstGeom>
+          <a:noFill/>
+        </p:spPr>
+        <p:txBody>
+          <a:bodyPr wrap="square" lIns="0" tIns="0" rIns="0" bIns="0" anchor="t">
+            <a:spAutoFit/>
+          </a:bodyPr>
+          <a:lstStyle/>
+          <a:p>
+            <a:pPr algn="l">
+              <a:spcAft>
+                <a:spcPts val="600"/>
+              </a:spcAft>
+            </a:pPr>
+            <a:r>
+              <a:rPr sz="1300" b="1">
+                <a:solidFill>
+                  <a:srgbClr val="B03A2E"/>
+                </a:solidFill>
+                <a:latin typeface="Microsoft JhengHei"/>
+              </a:rPr>
+              <a:t>水洗 漏抓</a:t>
+            </a:r>
+          </a:p>
+          <a:p>
+            <a:pPr algn="l">
+              <a:spcAft>
+                <a:spcPts val="600"/>
+              </a:spcAft>
+            </a:pPr>
+            <a:r>
+              <a:rPr sz="1300" b="1">
+                <a:solidFill>
+                  <a:srgbClr val="B03A2E"/>
+                </a:solidFill>
+                <a:latin typeface="Microsoft JhengHei"/>
+              </a:rPr>
+              <a:t>p_bad 0.453</a:t>
+            </a:r>
+          </a:p>
+        </p:txBody>
+      </p:sp>
+      <p:pic>
+        <p:nvPicPr>
+          <p:cNvPr id="11" name="Picture 10" descr="water_missed_0.490_P_20261007_205655.jpg"/>
+          <p:cNvPicPr>
+            <a:picLocks noChangeAspect="1"/>
+          </p:cNvPicPr>
+          <p:nvPr/>
+        </p:nvPicPr>
+        <p:blipFill>
+          <a:blip r:embed="rId6"/>
+          <a:stretch>
+            <a:fillRect/>
+          </a:stretch>
+        </p:blipFill>
+        <p:spPr>
+          <a:xfrm>
+            <a:off x="548640" y="3794760"/>
+            <a:ext cx="1828800" cy="1828800"/>
+          </a:xfrm>
+          <a:prstGeom prst="rect">
+            <a:avLst/>
+          </a:prstGeom>
+        </p:spPr>
+      </p:pic>
+      <p:sp>
+        <p:nvSpPr>
+          <p:cNvPr id="12" name="TextBox 11"/>
+          <p:cNvSpPr txBox="1"/>
+          <p:nvPr/>
+        </p:nvSpPr>
+        <p:spPr>
+          <a:xfrm>
+            <a:off x="548640" y="5669280"/>
+            <a:ext cx="2560320" cy="640080"/>
+          </a:xfrm>
+          <a:prstGeom prst="rect">
+            <a:avLst/>
+          </a:prstGeom>
+          <a:noFill/>
+        </p:spPr>
+        <p:txBody>
+          <a:bodyPr wrap="square" lIns="0" tIns="0" rIns="0" bIns="0" anchor="t">
+            <a:spAutoFit/>
+          </a:bodyPr>
+          <a:lstStyle/>
+          <a:p>
+            <a:pPr algn="l">
+              <a:spcAft>
+                <a:spcPts val="600"/>
+              </a:spcAft>
+            </a:pPr>
+            <a:r>
+              <a:rPr sz="1300" b="1">
+                <a:solidFill>
+                  <a:srgbClr val="B03A2E"/>
+                </a:solidFill>
+                <a:latin typeface="Microsoft JhengHei"/>
+              </a:rPr>
+              <a:t>水洗 漏抓</a:t>
+            </a:r>
+          </a:p>
+          <a:p>
+            <a:pPr algn="l">
+              <a:spcAft>
+                <a:spcPts val="600"/>
+              </a:spcAft>
+            </a:pPr>
+            <a:r>
+              <a:rPr sz="1300" b="1">
+                <a:solidFill>
+                  <a:srgbClr val="B03A2E"/>
+                </a:solidFill>
+                <a:latin typeface="Microsoft JhengHei"/>
+              </a:rPr>
+              <a:t>p_bad 0.490</a:t>
+            </a:r>
+          </a:p>
+        </p:txBody>
+      </p:sp>
+      <p:pic>
+        <p:nvPicPr>
+          <p:cNvPr id="13" name="Picture 12" descr="water_false_alarm_0.768_P_20261008_154404.jpg"/>
+          <p:cNvPicPr>
+            <a:picLocks noChangeAspect="1"/>
+          </p:cNvPicPr>
+          <p:nvPr/>
+        </p:nvPicPr>
+        <p:blipFill>
+          <a:blip r:embed="rId7"/>
+          <a:stretch>
+            <a:fillRect/>
+          </a:stretch>
+        </p:blipFill>
+        <p:spPr>
+          <a:xfrm>
+            <a:off x="3364992" y="3794760"/>
+            <a:ext cx="1828800" cy="1828800"/>
+          </a:xfrm>
+          <a:prstGeom prst="rect">
+            <a:avLst/>
+          </a:prstGeom>
+        </p:spPr>
+      </p:pic>
+      <p:sp>
+        <p:nvSpPr>
+          <p:cNvPr id="14" name="TextBox 13"/>
+          <p:cNvSpPr txBox="1"/>
+          <p:nvPr/>
+        </p:nvSpPr>
+        <p:spPr>
+          <a:xfrm>
+            <a:off x="3364992" y="5669280"/>
+            <a:ext cx="2560320" cy="640080"/>
+          </a:xfrm>
+          <a:prstGeom prst="rect">
+            <a:avLst/>
+          </a:prstGeom>
+          <a:noFill/>
+        </p:spPr>
+        <p:txBody>
+          <a:bodyPr wrap="square" lIns="0" tIns="0" rIns="0" bIns="0" anchor="t">
+            <a:spAutoFit/>
+          </a:bodyPr>
+          <a:lstStyle/>
+          <a:p>
+            <a:pPr algn="l">
+              <a:spcAft>
+                <a:spcPts val="600"/>
+              </a:spcAft>
+            </a:pPr>
+            <a:r>
+              <a:rPr sz="1300" b="1">
+                <a:solidFill>
+                  <a:srgbClr val="2B1D14"/>
+                </a:solidFill>
+                <a:latin typeface="Microsoft JhengHei"/>
+              </a:rPr>
+              <a:t>水洗 誤判</a:t>
+            </a:r>
+          </a:p>
+          <a:p>
+            <a:pPr algn="l">
+              <a:spcAft>
+                <a:spcPts val="600"/>
+              </a:spcAft>
+            </a:pPr>
+            <a:r>
+              <a:rPr sz="1300" b="1">
+                <a:solidFill>
+                  <a:srgbClr val="2B1D14"/>
+                </a:solidFill>
+                <a:latin typeface="Microsoft JhengHei"/>
+              </a:rPr>
+              <a:t>p_bad 0.768</a:t>
+            </a:r>
+          </a:p>
+        </p:txBody>
+      </p:sp>
+      <p:pic>
+        <p:nvPicPr>
+          <p:cNvPr id="15" name="Picture 14" descr="sun_missed_0.267_P_20261014_164140.jpg"/>
+          <p:cNvPicPr>
+            <a:picLocks noChangeAspect="1"/>
+          </p:cNvPicPr>
+          <p:nvPr/>
+        </p:nvPicPr>
+        <p:blipFill>
+          <a:blip r:embed="rId8"/>
+          <a:stretch>
+            <a:fillRect/>
+          </a:stretch>
+        </p:blipFill>
+        <p:spPr>
+          <a:xfrm>
+            <a:off x="6181344" y="3794760"/>
+            <a:ext cx="1828800" cy="1828800"/>
+          </a:xfrm>
+          <a:prstGeom prst="rect">
+            <a:avLst/>
+          </a:prstGeom>
+        </p:spPr>
+      </p:pic>
+      <p:sp>
+        <p:nvSpPr>
+          <p:cNvPr id="16" name="TextBox 15"/>
+          <p:cNvSpPr txBox="1"/>
+          <p:nvPr/>
+        </p:nvSpPr>
+        <p:spPr>
+          <a:xfrm>
+            <a:off x="6181344" y="5669280"/>
+            <a:ext cx="2560320" cy="640080"/>
+          </a:xfrm>
+          <a:prstGeom prst="rect">
+            <a:avLst/>
+          </a:prstGeom>
+          <a:noFill/>
+        </p:spPr>
+        <p:txBody>
+          <a:bodyPr wrap="square" lIns="0" tIns="0" rIns="0" bIns="0" anchor="t">
+            <a:spAutoFit/>
+          </a:bodyPr>
+          <a:lstStyle/>
+          <a:p>
+            <a:pPr algn="l">
+              <a:spcAft>
+                <a:spcPts val="600"/>
+              </a:spcAft>
+            </a:pPr>
+            <a:r>
+              <a:rPr sz="1300" b="1">
+                <a:solidFill>
+                  <a:srgbClr val="B03A2E"/>
+                </a:solidFill>
+                <a:latin typeface="Microsoft JhengHei"/>
+              </a:rPr>
+              <a:t>日曬 漏抓</a:t>
+            </a:r>
+          </a:p>
+          <a:p>
+            <a:pPr algn="l">
+              <a:spcAft>
+                <a:spcPts val="600"/>
+              </a:spcAft>
+            </a:pPr>
+            <a:r>
+              <a:rPr sz="1300" b="1">
+                <a:solidFill>
+                  <a:srgbClr val="B03A2E"/>
+                </a:solidFill>
+                <a:latin typeface="Microsoft JhengHei"/>
+              </a:rPr>
+              <a:t>p_bad 0.267</a:t>
+            </a:r>
+          </a:p>
+        </p:txBody>
+      </p:sp>
+      <p:pic>
+        <p:nvPicPr>
+          <p:cNvPr id="17" name="Picture 16" descr="honey_missed_0.405_P_20261014_135247.jpg"/>
+          <p:cNvPicPr>
+            <a:picLocks noChangeAspect="1"/>
+          </p:cNvPicPr>
+          <p:nvPr/>
+        </p:nvPicPr>
+        <p:blipFill>
+          <a:blip r:embed="rId9"/>
+          <a:stretch>
+            <a:fillRect/>
+          </a:stretch>
+        </p:blipFill>
+        <p:spPr>
+          <a:xfrm>
+            <a:off x="8997696" y="3794760"/>
+            <a:ext cx="1828800" cy="1828800"/>
+          </a:xfrm>
+          <a:prstGeom prst="rect">
+            <a:avLst/>
+          </a:prstGeom>
+        </p:spPr>
+      </p:pic>
+      <p:sp>
+        <p:nvSpPr>
+          <p:cNvPr id="18" name="TextBox 17"/>
+          <p:cNvSpPr txBox="1"/>
+          <p:nvPr/>
+        </p:nvSpPr>
+        <p:spPr>
+          <a:xfrm>
+            <a:off x="8997696" y="5669280"/>
+            <a:ext cx="2560320" cy="640080"/>
+          </a:xfrm>
+          <a:prstGeom prst="rect">
+            <a:avLst/>
+          </a:prstGeom>
+          <a:noFill/>
+        </p:spPr>
+        <p:txBody>
+          <a:bodyPr wrap="square" lIns="0" tIns="0" rIns="0" bIns="0" anchor="t">
+            <a:spAutoFit/>
+          </a:bodyPr>
+          <a:lstStyle/>
+          <a:p>
+            <a:pPr algn="l">
+              <a:spcAft>
+                <a:spcPts val="600"/>
+              </a:spcAft>
+            </a:pPr>
+            <a:r>
+              <a:rPr sz="1300" b="1">
+                <a:solidFill>
+                  <a:srgbClr val="B03A2E"/>
+                </a:solidFill>
+                <a:latin typeface="Microsoft JhengHei"/>
+              </a:rPr>
+              <a:t>蜜處理 漏抓</a:t>
+            </a:r>
+          </a:p>
+          <a:p>
+            <a:pPr algn="l">
+              <a:spcAft>
+                <a:spcPts val="600"/>
+              </a:spcAft>
+            </a:pPr>
+            <a:r>
+              <a:rPr sz="1300" b="1">
+                <a:solidFill>
+                  <a:srgbClr val="B03A2E"/>
+                </a:solidFill>
+                <a:latin typeface="Microsoft JhengHei"/>
+              </a:rPr>
+              <a:t>p_bad 0.405</a:t>
             </a:r>
           </a:p>
         </p:txBody>
